--- a/smoke_samples/31_hyperlinks.pptx
+++ b/smoke_samples/31_hyperlinks.pptx
@@ -229,7 +229,7 @@
         <p:spPr>
           <a:xfrm>
             <a:off x="457200" y="274638"/>
-            <a:ext cx="8230200" cy="1143000"/>
+            <a:ext cx="8229600" cy="1143000"/>
           </a:xfrm>
           <a:prstGeom prst="rect">
             <a:avLst/>
@@ -242,7 +242,7 @@
           <a:p>
             <a:pPr algn="l"/>
             <a:r>
-              <a:rPr lang="en-US" sz="4400" b="1" i="0" dirty="0"/>
+              <a:rPr lang="en-US" sz="4400" b="0" i="0" u="none" dirty="0"/>
               <a:t>Hyperlinks</a:t>
             </a:r>
           </a:p>
@@ -257,7 +257,7 @@
         <p:spPr>
           <a:xfrm>
             <a:off x="457200" y="1600200"/>
-            <a:ext cx="8230200" cy="4572000"/>
+            <a:ext cx="8229600" cy="4572000"/>
           </a:xfrm>
           <a:prstGeom prst="rect">
             <a:avLst/>
@@ -272,7 +272,7 @@
               <a:buChar char="•"/>
             </a:pPr>
             <a:r>
-              <a:rPr lang="en-US" sz="2800" b="0" i="0" dirty="0"/>
+              <a:rPr lang="en-US" sz="2800" b="0" i="0" u="none" dirty="0"/>
               <a:t>Shape with URL hyperlink</a:t>
             </a:r>
           </a:p>
@@ -281,7 +281,7 @@
               <a:buChar char="•"/>
             </a:pPr>
             <a:r>
-              <a:rPr lang="en-US" sz="2800" b="0" i="0" dirty="0"/>
+              <a:rPr lang="en-US" sz="2800" b="0" i="0" u="none" dirty="0"/>
               <a:t>Tooltip on hover</a:t>
             </a:r>
           </a:p>

--- a/smoke_samples/31_hyperlinks.pptx
+++ b/smoke_samples/31_hyperlinks.pptx
@@ -265,14 +265,14 @@
           <a:noFill/>
         </p:spPr>
         <p:txBody>
-          <a:bodyPr wrap="square" rtlCol="0"/>
+          <a:bodyPr wrap="square" rtlCol="0" anchor="t"/>
           <a:lstStyle/>
           <a:p>
             <a:pPr lvl="0" marL="457200" indent="-457200">
               <a:buChar char="•"/>
             </a:pPr>
             <a:r>
-              <a:rPr lang="en-US" sz="2800" b="0" i="0" u="none" dirty="0"/>
+              <a:rPr lang="en-US" sz="1800" b="0" i="0" u="none" dirty="0"/>
               <a:t>Shape with URL hyperlink</a:t>
             </a:r>
           </a:p>
@@ -281,7 +281,7 @@
               <a:buChar char="•"/>
             </a:pPr>
             <a:r>
-              <a:rPr lang="en-US" sz="2800" b="0" i="0" u="none" dirty="0"/>
+              <a:rPr lang="en-US" sz="1800" b="0" i="0" u="none" dirty="0"/>
               <a:t>Tooltip on hover</a:t>
             </a:r>
           </a:p>
@@ -290,12 +290,12 @@
               <a:buChar char="•"/>
             </a:pPr>
             <a:r>
-              <a:rPr lang="en-US" sz="2800" b="0" i="0" u="none" dirty="0"/>
+              <a:rPr lang="en-US" sz="1800" b="0" i="0" u="none" dirty="0"/>
               <a:t>Text hyperlink: </a:t>
             </a:r>
             <a:r>
-              <a:rPr lang="en-US" sz="2800" b="0" i="0" u="sng" dirty="0">
-                <a:hlinkClick r:id="rId3" highlightClick="1"/>
+              <a:rPr lang="en-US" sz="1800" b="0" i="0" u="sng" dirty="0">
+                <a:hlinkClick r:id="rId2" highlightClick="1"/>
                 <a:solidFill>
                   <a:srgbClr val="0000FF"/>
                 </a:solidFill>
@@ -326,14 +326,14 @@
           </a:solidFill>
         </p:spPr>
         <p:txBody>
-          <a:bodyPr wrap="square" rtlCol="0" anchor="ctr">
+          <a:bodyPr wrap="square" rtlCol="0" anchor="ctr" marL="45720" marT="45720" marR="45720" marB="45720">
             <a:spAutoFit/>
           </a:bodyPr>
           <a:lstStyle/>
           <a:p>
             <a:pPr algn="ctr"/>
             <a:r>
-              <a:rPr lang="en-US" sz="2000" b="0" i="0" u="none" dirty="0">
+              <a:rPr lang="en-US" sz="1800" b="0" i="0" u="none" dirty="0">
                 <a:solidFill>
                   <a:srgbClr val="FFFFFF"/>
                 </a:solidFill>

--- a/smoke_samples/31_hyperlinks.pptx
+++ b/smoke_samples/31_hyperlinks.pptx
@@ -201,11 +201,6 @@
 <file path=ppt/slides/slide1.xml><?xml version="1.0" encoding="utf-8"?>
 <p:sld xmlns:a="http://schemas.openxmlformats.org/drawingml/2006/main" xmlns:c="http://schemas.openxmlformats.org/drawingml/2006/chart" xmlns:r="http://schemas.openxmlformats.org/officeDocument/2006/relationships" xmlns:p="http://schemas.openxmlformats.org/presentationml/2006/main">
   <p:cSld>
-    <p:bg>
-      <p:bgRef idx="1001">
-        <a:schemeClr val="bg1"/>
-      </p:bgRef>
-    </p:bg>
     <p:spTree>
       <p:nvGrpSpPr>
         <p:cNvPr id="1" name=""/>
@@ -331,7 +326,7 @@
           </a:bodyPr>
           <a:lstStyle/>
           <a:p>
-            <a:pPr algn="ctr"/>
+            <a:pPr algn="l"/>
             <a:r>
               <a:rPr lang="en-US" sz="1800" b="0" i="0" u="none" dirty="0">
                 <a:solidFill>
@@ -353,9 +348,9 @@
 </file>
 
 <file path=ppt/theme/theme1.xml><?xml version="1.0" encoding="utf-8"?>
-<a:theme xmlns:a="http://schemas.openxmlformats.org/drawingml/2006/main" name="Office Theme">
+<a:theme xmlns:a="http://schemas.openxmlformats.org/drawingml/2006/main" name="Office Theme marketing">
   <a:themeElements>
-    <a:clrScheme name="Office">
+    <a:clrScheme name="Office colors">
       <a:dk1>
         <a:sysClr val="windowText" lastClr="000000"/>
       </a:dk1>
@@ -393,7 +388,7 @@
         <a:srgbClr val="800080"/>
       </a:folHlink>
     </a:clrScheme>
-    <a:fontScheme name="Office">
+    <a:fontScheme name="Office fonts">
       <a:majorFont>
         <a:latin typeface="Calibri"/>
         <a:ea typeface=""/>

--- a/smoke_samples/31_hyperlinks.pptx
+++ b/smoke_samples/31_hyperlinks.pptx
@@ -310,8 +310,8 @@
         </p:nvSpPr>
         <p:spPr>
           <a:xfrm>
-            <a:off x="1000000" y="2000000"/>
-            <a:ext cx="3000000" cy="800000"/>
+            <a:off x="914400" y="1828800"/>
+            <a:ext cx="2743200" cy="800000"/>
           </a:xfrm>
           <a:prstGeom prst="roundRect">
             <a:avLst/>
